--- a/week-08/capstone2.pptx
+++ b/week-08/capstone2.pptx
@@ -4,6 +4,9 @@
   <p:sldMasterIdLst>
     <p:sldMasterId id="2147483648" r:id="rId1"/>
   </p:sldMasterIdLst>
+  <p:notesMasterIdLst>
+    <p:notesMasterId r:id="rId9"/>
+  </p:notesMasterIdLst>
   <p:sldIdLst>
     <p:sldId id="256" r:id="rId2"/>
     <p:sldId id="257" r:id="rId3"/>
@@ -110,7 +113,1083 @@
       </a:defRPr>
     </a:lvl9pPr>
   </p:defaultTextStyle>
+  <p:extLst>
+    <p:ext uri="{EFAFB233-063F-42B5-8137-9DF3F51BA10A}">
+      <p15:sldGuideLst xmlns:p15="http://schemas.microsoft.com/office/powerpoint/2012/main"/>
+    </p:ext>
+  </p:extLst>
 </p:presentation>
+</file>
+
+<file path=ppt/notesMasters/notesMaster1.xml><?xml version="1.0" encoding="utf-8"?>
+<p:notesMaster xmlns:a="http://schemas.openxmlformats.org/drawingml/2006/main" xmlns:r="http://schemas.openxmlformats.org/officeDocument/2006/relationships" xmlns:p="http://schemas.openxmlformats.org/presentationml/2006/main">
+  <p:cSld>
+    <p:bg>
+      <p:bgRef idx="1001">
+        <a:schemeClr val="bg1"/>
+      </p:bgRef>
+    </p:bg>
+    <p:spTree>
+      <p:nvGrpSpPr>
+        <p:cNvPr id="1" name=""/>
+        <p:cNvGrpSpPr/>
+        <p:nvPr/>
+      </p:nvGrpSpPr>
+      <p:grpSpPr>
+        <a:xfrm>
+          <a:off x="0" y="0"/>
+          <a:ext cx="0" cy="0"/>
+          <a:chOff x="0" y="0"/>
+          <a:chExt cx="0" cy="0"/>
+        </a:xfrm>
+      </p:grpSpPr>
+      <p:sp>
+        <p:nvSpPr>
+          <p:cNvPr id="2" name="Header Placeholder 1"/>
+          <p:cNvSpPr>
+            <a:spLocks noGrp="1"/>
+          </p:cNvSpPr>
+          <p:nvPr>
+            <p:ph type="hdr" sz="quarter"/>
+          </p:nvPr>
+        </p:nvSpPr>
+        <p:spPr>
+          <a:xfrm>
+            <a:off x="0" y="0"/>
+            <a:ext cx="2971800" cy="458788"/>
+          </a:xfrm>
+          <a:prstGeom prst="rect">
+            <a:avLst/>
+          </a:prstGeom>
+        </p:spPr>
+        <p:txBody>
+          <a:bodyPr vert="horz" lIns="91440" tIns="45720" rIns="91440" bIns="45720" rtlCol="0"/>
+          <a:lstStyle>
+            <a:lvl1pPr algn="l">
+              <a:defRPr sz="1200"/>
+            </a:lvl1pPr>
+          </a:lstStyle>
+          <a:p>
+            <a:endParaRPr lang="en-US"/>
+          </a:p>
+        </p:txBody>
+      </p:sp>
+      <p:sp>
+        <p:nvSpPr>
+          <p:cNvPr id="3" name="Date Placeholder 2"/>
+          <p:cNvSpPr>
+            <a:spLocks noGrp="1"/>
+          </p:cNvSpPr>
+          <p:nvPr>
+            <p:ph type="dt" idx="1"/>
+          </p:nvPr>
+        </p:nvSpPr>
+        <p:spPr>
+          <a:xfrm>
+            <a:off x="3884613" y="0"/>
+            <a:ext cx="2971800" cy="458788"/>
+          </a:xfrm>
+          <a:prstGeom prst="rect">
+            <a:avLst/>
+          </a:prstGeom>
+        </p:spPr>
+        <p:txBody>
+          <a:bodyPr vert="horz" lIns="91440" tIns="45720" rIns="91440" bIns="45720" rtlCol="0"/>
+          <a:lstStyle>
+            <a:lvl1pPr algn="r">
+              <a:defRPr sz="1200"/>
+            </a:lvl1pPr>
+          </a:lstStyle>
+          <a:p>
+            <a:fld id="{941F6F01-2DD9-2F4F-A65E-9B1D1BB84B5D}" type="datetimeFigureOut">
+              <a:rPr lang="en-US" smtClean="0"/>
+              <a:t>5/29/26</a:t>
+            </a:fld>
+            <a:endParaRPr lang="en-US"/>
+          </a:p>
+        </p:txBody>
+      </p:sp>
+      <p:sp>
+        <p:nvSpPr>
+          <p:cNvPr id="4" name="Slide Image Placeholder 3"/>
+          <p:cNvSpPr>
+            <a:spLocks noGrp="1" noRot="1" noChangeAspect="1"/>
+          </p:cNvSpPr>
+          <p:nvPr>
+            <p:ph type="sldImg" idx="2"/>
+          </p:nvPr>
+        </p:nvSpPr>
+        <p:spPr>
+          <a:xfrm>
+            <a:off x="685800" y="1143000"/>
+            <a:ext cx="5486400" cy="3086100"/>
+          </a:xfrm>
+          <a:prstGeom prst="rect">
+            <a:avLst/>
+          </a:prstGeom>
+          <a:noFill/>
+          <a:ln w="12700">
+            <a:solidFill>
+              <a:prstClr val="black"/>
+            </a:solidFill>
+          </a:ln>
+        </p:spPr>
+        <p:txBody>
+          <a:bodyPr vert="horz" lIns="91440" tIns="45720" rIns="91440" bIns="45720" rtlCol="0" anchor="ctr"/>
+          <a:lstStyle/>
+          <a:p>
+            <a:endParaRPr lang="en-US"/>
+          </a:p>
+        </p:txBody>
+      </p:sp>
+      <p:sp>
+        <p:nvSpPr>
+          <p:cNvPr id="5" name="Notes Placeholder 4"/>
+          <p:cNvSpPr>
+            <a:spLocks noGrp="1"/>
+          </p:cNvSpPr>
+          <p:nvPr>
+            <p:ph type="body" sz="quarter" idx="3"/>
+          </p:nvPr>
+        </p:nvSpPr>
+        <p:spPr>
+          <a:xfrm>
+            <a:off x="685800" y="4400550"/>
+            <a:ext cx="5486400" cy="3600450"/>
+          </a:xfrm>
+          <a:prstGeom prst="rect">
+            <a:avLst/>
+          </a:prstGeom>
+        </p:spPr>
+        <p:txBody>
+          <a:bodyPr vert="horz" lIns="91440" tIns="45720" rIns="91440" bIns="45720" rtlCol="0"/>
+          <a:lstStyle/>
+          <a:p>
+            <a:pPr lvl="0"/>
+            <a:r>
+              <a:rPr lang="en-US"/>
+              <a:t>Click to edit Master text styles</a:t>
+            </a:r>
+          </a:p>
+          <a:p>
+            <a:pPr lvl="1"/>
+            <a:r>
+              <a:rPr lang="en-US"/>
+              <a:t>Second level</a:t>
+            </a:r>
+          </a:p>
+          <a:p>
+            <a:pPr lvl="2"/>
+            <a:r>
+              <a:rPr lang="en-US"/>
+              <a:t>Third level</a:t>
+            </a:r>
+          </a:p>
+          <a:p>
+            <a:pPr lvl="3"/>
+            <a:r>
+              <a:rPr lang="en-US"/>
+              <a:t>Fourth level</a:t>
+            </a:r>
+          </a:p>
+          <a:p>
+            <a:pPr lvl="4"/>
+            <a:r>
+              <a:rPr lang="en-US"/>
+              <a:t>Fifth level</a:t>
+            </a:r>
+          </a:p>
+        </p:txBody>
+      </p:sp>
+      <p:sp>
+        <p:nvSpPr>
+          <p:cNvPr id="6" name="Footer Placeholder 5"/>
+          <p:cNvSpPr>
+            <a:spLocks noGrp="1"/>
+          </p:cNvSpPr>
+          <p:nvPr>
+            <p:ph type="ftr" sz="quarter" idx="4"/>
+          </p:nvPr>
+        </p:nvSpPr>
+        <p:spPr>
+          <a:xfrm>
+            <a:off x="0" y="8685213"/>
+            <a:ext cx="2971800" cy="458787"/>
+          </a:xfrm>
+          <a:prstGeom prst="rect">
+            <a:avLst/>
+          </a:prstGeom>
+        </p:spPr>
+        <p:txBody>
+          <a:bodyPr vert="horz" lIns="91440" tIns="45720" rIns="91440" bIns="45720" rtlCol="0" anchor="b"/>
+          <a:lstStyle>
+            <a:lvl1pPr algn="l">
+              <a:defRPr sz="1200"/>
+            </a:lvl1pPr>
+          </a:lstStyle>
+          <a:p>
+            <a:endParaRPr lang="en-US"/>
+          </a:p>
+        </p:txBody>
+      </p:sp>
+      <p:sp>
+        <p:nvSpPr>
+          <p:cNvPr id="7" name="Slide Number Placeholder 6"/>
+          <p:cNvSpPr>
+            <a:spLocks noGrp="1"/>
+          </p:cNvSpPr>
+          <p:nvPr>
+            <p:ph type="sldNum" sz="quarter" idx="5"/>
+          </p:nvPr>
+        </p:nvSpPr>
+        <p:spPr>
+          <a:xfrm>
+            <a:off x="3884613" y="8685213"/>
+            <a:ext cx="2971800" cy="458787"/>
+          </a:xfrm>
+          <a:prstGeom prst="rect">
+            <a:avLst/>
+          </a:prstGeom>
+        </p:spPr>
+        <p:txBody>
+          <a:bodyPr vert="horz" lIns="91440" tIns="45720" rIns="91440" bIns="45720" rtlCol="0" anchor="b"/>
+          <a:lstStyle>
+            <a:lvl1pPr algn="r">
+              <a:defRPr sz="1200"/>
+            </a:lvl1pPr>
+          </a:lstStyle>
+          <a:p>
+            <a:fld id="{A7C754CD-AB1C-D041-9D43-C7DD400327C5}" type="slidenum">
+              <a:rPr lang="en-US" smtClean="0"/>
+              <a:t>‹#›</a:t>
+            </a:fld>
+            <a:endParaRPr lang="en-US"/>
+          </a:p>
+        </p:txBody>
+      </p:sp>
+    </p:spTree>
+    <p:extLst>
+      <p:ext uri="{BB962C8B-B14F-4D97-AF65-F5344CB8AC3E}">
+        <p14:creationId xmlns:p14="http://schemas.microsoft.com/office/powerpoint/2010/main" val="1461590791"/>
+      </p:ext>
+    </p:extLst>
+  </p:cSld>
+  <p:clrMap bg1="lt1" tx1="dk1" bg2="lt2" tx2="dk2" accent1="accent1" accent2="accent2" accent3="accent3" accent4="accent4" accent5="accent5" accent6="accent6" hlink="hlink" folHlink="folHlink"/>
+  <p:notesStyle>
+    <a:lvl1pPr marL="0" algn="l" defTabSz="914400" rtl="0" eaLnBrk="1" latinLnBrk="0" hangingPunct="1">
+      <a:defRPr sz="1200" kern="1200">
+        <a:solidFill>
+          <a:schemeClr val="tx1"/>
+        </a:solidFill>
+        <a:latin typeface="+mn-lt"/>
+        <a:ea typeface="+mn-ea"/>
+        <a:cs typeface="+mn-cs"/>
+      </a:defRPr>
+    </a:lvl1pPr>
+    <a:lvl2pPr marL="457200" algn="l" defTabSz="914400" rtl="0" eaLnBrk="1" latinLnBrk="0" hangingPunct="1">
+      <a:defRPr sz="1200" kern="1200">
+        <a:solidFill>
+          <a:schemeClr val="tx1"/>
+        </a:solidFill>
+        <a:latin typeface="+mn-lt"/>
+        <a:ea typeface="+mn-ea"/>
+        <a:cs typeface="+mn-cs"/>
+      </a:defRPr>
+    </a:lvl2pPr>
+    <a:lvl3pPr marL="914400" algn="l" defTabSz="914400" rtl="0" eaLnBrk="1" latinLnBrk="0" hangingPunct="1">
+      <a:defRPr sz="1200" kern="1200">
+        <a:solidFill>
+          <a:schemeClr val="tx1"/>
+        </a:solidFill>
+        <a:latin typeface="+mn-lt"/>
+        <a:ea typeface="+mn-ea"/>
+        <a:cs typeface="+mn-cs"/>
+      </a:defRPr>
+    </a:lvl3pPr>
+    <a:lvl4pPr marL="1371600" algn="l" defTabSz="914400" rtl="0" eaLnBrk="1" latinLnBrk="0" hangingPunct="1">
+      <a:defRPr sz="1200" kern="1200">
+        <a:solidFill>
+          <a:schemeClr val="tx1"/>
+        </a:solidFill>
+        <a:latin typeface="+mn-lt"/>
+        <a:ea typeface="+mn-ea"/>
+        <a:cs typeface="+mn-cs"/>
+      </a:defRPr>
+    </a:lvl4pPr>
+    <a:lvl5pPr marL="1828800" algn="l" defTabSz="914400" rtl="0" eaLnBrk="1" latinLnBrk="0" hangingPunct="1">
+      <a:defRPr sz="1200" kern="1200">
+        <a:solidFill>
+          <a:schemeClr val="tx1"/>
+        </a:solidFill>
+        <a:latin typeface="+mn-lt"/>
+        <a:ea typeface="+mn-ea"/>
+        <a:cs typeface="+mn-cs"/>
+      </a:defRPr>
+    </a:lvl5pPr>
+    <a:lvl6pPr marL="2286000" algn="l" defTabSz="914400" rtl="0" eaLnBrk="1" latinLnBrk="0" hangingPunct="1">
+      <a:defRPr sz="1200" kern="1200">
+        <a:solidFill>
+          <a:schemeClr val="tx1"/>
+        </a:solidFill>
+        <a:latin typeface="+mn-lt"/>
+        <a:ea typeface="+mn-ea"/>
+        <a:cs typeface="+mn-cs"/>
+      </a:defRPr>
+    </a:lvl6pPr>
+    <a:lvl7pPr marL="2743200" algn="l" defTabSz="914400" rtl="0" eaLnBrk="1" latinLnBrk="0" hangingPunct="1">
+      <a:defRPr sz="1200" kern="1200">
+        <a:solidFill>
+          <a:schemeClr val="tx1"/>
+        </a:solidFill>
+        <a:latin typeface="+mn-lt"/>
+        <a:ea typeface="+mn-ea"/>
+        <a:cs typeface="+mn-cs"/>
+      </a:defRPr>
+    </a:lvl7pPr>
+    <a:lvl8pPr marL="3200400" algn="l" defTabSz="914400" rtl="0" eaLnBrk="1" latinLnBrk="0" hangingPunct="1">
+      <a:defRPr sz="1200" kern="1200">
+        <a:solidFill>
+          <a:schemeClr val="tx1"/>
+        </a:solidFill>
+        <a:latin typeface="+mn-lt"/>
+        <a:ea typeface="+mn-ea"/>
+        <a:cs typeface="+mn-cs"/>
+      </a:defRPr>
+    </a:lvl8pPr>
+    <a:lvl9pPr marL="3657600" algn="l" defTabSz="914400" rtl="0" eaLnBrk="1" latinLnBrk="0" hangingPunct="1">
+      <a:defRPr sz="1200" kern="1200">
+        <a:solidFill>
+          <a:schemeClr val="tx1"/>
+        </a:solidFill>
+        <a:latin typeface="+mn-lt"/>
+        <a:ea typeface="+mn-ea"/>
+        <a:cs typeface="+mn-cs"/>
+      </a:defRPr>
+    </a:lvl9pPr>
+  </p:notesStyle>
+</p:notesMaster>
+</file>
+
+<file path=ppt/notesSlides/notesSlide1.xml><?xml version="1.0" encoding="utf-8"?>
+<p:notes xmlns:a="http://schemas.openxmlformats.org/drawingml/2006/main" xmlns:r="http://schemas.openxmlformats.org/officeDocument/2006/relationships" xmlns:p="http://schemas.openxmlformats.org/presentationml/2006/main">
+  <p:cSld>
+    <p:spTree>
+      <p:nvGrpSpPr>
+        <p:cNvPr id="1" name=""/>
+        <p:cNvGrpSpPr/>
+        <p:nvPr/>
+      </p:nvGrpSpPr>
+      <p:grpSpPr>
+        <a:xfrm>
+          <a:off x="0" y="0"/>
+          <a:ext cx="0" cy="0"/>
+          <a:chOff x="0" y="0"/>
+          <a:chExt cx="0" cy="0"/>
+        </a:xfrm>
+      </p:grpSpPr>
+      <p:sp>
+        <p:nvSpPr>
+          <p:cNvPr id="2" name="Slide Image Placeholder 1"/>
+          <p:cNvSpPr>
+            <a:spLocks noGrp="1" noRot="1" noChangeAspect="1"/>
+          </p:cNvSpPr>
+          <p:nvPr>
+            <p:ph type="sldImg"/>
+          </p:nvPr>
+        </p:nvSpPr>
+        <p:spPr/>
+      </p:sp>
+      <p:sp>
+        <p:nvSpPr>
+          <p:cNvPr id="3" name="Notes Placeholder 2"/>
+          <p:cNvSpPr>
+            <a:spLocks noGrp="1"/>
+          </p:cNvSpPr>
+          <p:nvPr>
+            <p:ph type="body" idx="1"/>
+          </p:nvPr>
+        </p:nvSpPr>
+        <p:spPr/>
+        <p:txBody>
+          <a:bodyPr/>
+          <a:lstStyle/>
+          <a:p>
+            <a:r>
+              <a:rPr lang="en-US" dirty="0"/>
+              <a:t>Today I'll walk you through a sales performance analysis for the Lana Ilana territory, covering four full years of data from January 2022 through December 2025. We'll look at revenue trends, store-level performance, customer behavior, and product category mix — and end with concrete actions the territory can take going forward.</a:t>
+            </a:r>
+          </a:p>
+        </p:txBody>
+      </p:sp>
+      <p:sp>
+        <p:nvSpPr>
+          <p:cNvPr id="4" name="Slide Number Placeholder 3"/>
+          <p:cNvSpPr>
+            <a:spLocks noGrp="1"/>
+          </p:cNvSpPr>
+          <p:nvPr>
+            <p:ph type="sldNum" sz="quarter" idx="5"/>
+          </p:nvPr>
+        </p:nvSpPr>
+        <p:spPr/>
+        <p:txBody>
+          <a:bodyPr/>
+          <a:lstStyle/>
+          <a:p>
+            <a:fld id="{A7C754CD-AB1C-D041-9D43-C7DD400327C5}" type="slidenum">
+              <a:rPr lang="en-US" smtClean="0"/>
+              <a:t>1</a:t>
+            </a:fld>
+            <a:endParaRPr lang="en-US"/>
+          </a:p>
+        </p:txBody>
+      </p:sp>
+    </p:spTree>
+    <p:extLst>
+      <p:ext uri="{BB962C8B-B14F-4D97-AF65-F5344CB8AC3E}">
+        <p14:creationId xmlns:p14="http://schemas.microsoft.com/office/powerpoint/2010/main" val="2831230940"/>
+      </p:ext>
+    </p:extLst>
+  </p:cSld>
+  <p:clrMapOvr>
+    <a:masterClrMapping/>
+  </p:clrMapOvr>
+</p:notes>
+</file>
+
+<file path=ppt/notesSlides/notesSlide2.xml><?xml version="1.0" encoding="utf-8"?>
+<p:notes xmlns:a="http://schemas.openxmlformats.org/drawingml/2006/main" xmlns:r="http://schemas.openxmlformats.org/officeDocument/2006/relationships" xmlns:p="http://schemas.openxmlformats.org/presentationml/2006/main">
+  <p:cSld>
+    <p:spTree>
+      <p:nvGrpSpPr>
+        <p:cNvPr id="1" name=""/>
+        <p:cNvGrpSpPr/>
+        <p:nvPr/>
+      </p:nvGrpSpPr>
+      <p:grpSpPr>
+        <a:xfrm>
+          <a:off x="0" y="0"/>
+          <a:ext cx="0" cy="0"/>
+          <a:chOff x="0" y="0"/>
+          <a:chExt cx="0" cy="0"/>
+        </a:xfrm>
+      </p:grpSpPr>
+      <p:sp>
+        <p:nvSpPr>
+          <p:cNvPr id="2" name="Slide Image Placeholder 1"/>
+          <p:cNvSpPr>
+            <a:spLocks noGrp="1" noRot="1" noChangeAspect="1"/>
+          </p:cNvSpPr>
+          <p:nvPr>
+            <p:ph type="sldImg"/>
+          </p:nvPr>
+        </p:nvSpPr>
+        <p:spPr/>
+      </p:sp>
+      <p:sp>
+        <p:nvSpPr>
+          <p:cNvPr id="3" name="Notes Placeholder 2"/>
+          <p:cNvSpPr>
+            <a:spLocks noGrp="1"/>
+          </p:cNvSpPr>
+          <p:nvPr>
+            <p:ph type="body" idx="1"/>
+          </p:nvPr>
+        </p:nvSpPr>
+        <p:spPr/>
+        <p:txBody>
+          <a:bodyPr/>
+          <a:lstStyle/>
+          <a:p>
+            <a:r>
+              <a:rPr lang="en-US" dirty="0"/>
+              <a:t>Let's start with the big picture. Over the four-year window, Lana Ilana's territory generated </a:t>
+            </a:r>
+            <a:r>
+              <a:rPr lang="en-US" b="1" dirty="0"/>
+              <a:t>$3.93 million</a:t>
+            </a:r>
+            <a:r>
+              <a:rPr lang="en-US" dirty="0"/>
+              <a:t> in total revenue. The headline number is growth: revenue went from $598K in 2022 to $1.5 million in 2025 — a </a:t>
+            </a:r>
+            <a:r>
+              <a:rPr lang="en-US" b="1" dirty="0"/>
+              <a:t>150% increase</a:t>
+            </a:r>
+            <a:r>
+              <a:rPr lang="en-US" dirty="0"/>
+              <a:t>. The single best month was </a:t>
+            </a:r>
+            <a:r>
+              <a:rPr lang="en-US" b="1" dirty="0"/>
+              <a:t>October 2025 at $188K</a:t>
+            </a:r>
+            <a:r>
+              <a:rPr lang="en-US" dirty="0"/>
+              <a:t>, which is the all-time record for the territory. As you can see on the chart, the trend is clearly upward, with momentum accelerating in the most recent year.</a:t>
+            </a:r>
+          </a:p>
+        </p:txBody>
+      </p:sp>
+      <p:sp>
+        <p:nvSpPr>
+          <p:cNvPr id="4" name="Slide Number Placeholder 3"/>
+          <p:cNvSpPr>
+            <a:spLocks noGrp="1"/>
+          </p:cNvSpPr>
+          <p:nvPr>
+            <p:ph type="sldNum" sz="quarter" idx="5"/>
+          </p:nvPr>
+        </p:nvSpPr>
+        <p:spPr/>
+        <p:txBody>
+          <a:bodyPr/>
+          <a:lstStyle/>
+          <a:p>
+            <a:fld id="{A7C754CD-AB1C-D041-9D43-C7DD400327C5}" type="slidenum">
+              <a:rPr lang="en-US" smtClean="0"/>
+              <a:t>2</a:t>
+            </a:fld>
+            <a:endParaRPr lang="en-US"/>
+          </a:p>
+        </p:txBody>
+      </p:sp>
+    </p:spTree>
+    <p:extLst>
+      <p:ext uri="{BB962C8B-B14F-4D97-AF65-F5344CB8AC3E}">
+        <p14:creationId xmlns:p14="http://schemas.microsoft.com/office/powerpoint/2010/main" val="4159793094"/>
+      </p:ext>
+    </p:extLst>
+  </p:cSld>
+  <p:clrMapOvr>
+    <a:masterClrMapping/>
+  </p:clrMapOvr>
+</p:notes>
+</file>
+
+<file path=ppt/notesSlides/notesSlide3.xml><?xml version="1.0" encoding="utf-8"?>
+<p:notes xmlns:a="http://schemas.openxmlformats.org/drawingml/2006/main" xmlns:r="http://schemas.openxmlformats.org/officeDocument/2006/relationships" xmlns:p="http://schemas.openxmlformats.org/presentationml/2006/main">
+  <p:cSld>
+    <p:spTree>
+      <p:nvGrpSpPr>
+        <p:cNvPr id="1" name=""/>
+        <p:cNvGrpSpPr/>
+        <p:nvPr/>
+      </p:nvGrpSpPr>
+      <p:grpSpPr>
+        <a:xfrm>
+          <a:off x="0" y="0"/>
+          <a:ext cx="0" cy="0"/>
+          <a:chOff x="0" y="0"/>
+          <a:chExt cx="0" cy="0"/>
+        </a:xfrm>
+      </p:grpSpPr>
+      <p:sp>
+        <p:nvSpPr>
+          <p:cNvPr id="2" name="Slide Image Placeholder 1"/>
+          <p:cNvSpPr>
+            <a:spLocks noGrp="1" noRot="1" noChangeAspect="1"/>
+          </p:cNvSpPr>
+          <p:nvPr>
+            <p:ph type="sldImg"/>
+          </p:nvPr>
+        </p:nvSpPr>
+        <p:spPr/>
+      </p:sp>
+      <p:sp>
+        <p:nvSpPr>
+          <p:cNvPr id="3" name="Notes Placeholder 2"/>
+          <p:cNvSpPr>
+            <a:spLocks noGrp="1"/>
+          </p:cNvSpPr>
+          <p:nvPr>
+            <p:ph type="body" idx="1"/>
+          </p:nvPr>
+        </p:nvSpPr>
+        <p:spPr/>
+        <p:txBody>
+          <a:bodyPr/>
+          <a:lstStyle/>
+          <a:p>
+            <a:r>
+              <a:rPr lang="en-US" dirty="0"/>
+              <a:t>Breaking it down year by year tells a more interesting story. The first big jump happened between 2022 and 2023 — a 53% increase. Then in 2024, growth essentially stalled — almost flat compared to 2023. But starting in </a:t>
+            </a:r>
+            <a:r>
+              <a:rPr lang="en-US" b="1" dirty="0"/>
+              <a:t>late 2024</a:t>
+            </a:r>
+            <a:r>
+              <a:rPr lang="en-US" dirty="0"/>
+              <a:t>, we see a sharp rise that continues through all of 2025, ending the year up another 63%. So the territory isn't growing steadily — it's growing in distinct waves. Understanding what triggered the late-2024 inflection point is critical, and I'll come back to that.</a:t>
+            </a:r>
+          </a:p>
+        </p:txBody>
+      </p:sp>
+      <p:sp>
+        <p:nvSpPr>
+          <p:cNvPr id="4" name="Slide Number Placeholder 3"/>
+          <p:cNvSpPr>
+            <a:spLocks noGrp="1"/>
+          </p:cNvSpPr>
+          <p:nvPr>
+            <p:ph type="sldNum" sz="quarter" idx="5"/>
+          </p:nvPr>
+        </p:nvSpPr>
+        <p:spPr/>
+        <p:txBody>
+          <a:bodyPr/>
+          <a:lstStyle/>
+          <a:p>
+            <a:fld id="{A7C754CD-AB1C-D041-9D43-C7DD400327C5}" type="slidenum">
+              <a:rPr lang="en-US" smtClean="0"/>
+              <a:t>3</a:t>
+            </a:fld>
+            <a:endParaRPr lang="en-US"/>
+          </a:p>
+        </p:txBody>
+      </p:sp>
+    </p:spTree>
+    <p:extLst>
+      <p:ext uri="{BB962C8B-B14F-4D97-AF65-F5344CB8AC3E}">
+        <p14:creationId xmlns:p14="http://schemas.microsoft.com/office/powerpoint/2010/main" val="3158457150"/>
+      </p:ext>
+    </p:extLst>
+  </p:cSld>
+  <p:clrMapOvr>
+    <a:masterClrMapping/>
+  </p:clrMapOvr>
+</p:notes>
+</file>
+
+<file path=ppt/notesSlides/notesSlide4.xml><?xml version="1.0" encoding="utf-8"?>
+<p:notes xmlns:a="http://schemas.openxmlformats.org/drawingml/2006/main" xmlns:r="http://schemas.openxmlformats.org/officeDocument/2006/relationships" xmlns:p="http://schemas.openxmlformats.org/presentationml/2006/main">
+  <p:cSld>
+    <p:spTree>
+      <p:nvGrpSpPr>
+        <p:cNvPr id="1" name=""/>
+        <p:cNvGrpSpPr/>
+        <p:nvPr/>
+      </p:nvGrpSpPr>
+      <p:grpSpPr>
+        <a:xfrm>
+          <a:off x="0" y="0"/>
+          <a:ext cx="0" cy="0"/>
+          <a:chOff x="0" y="0"/>
+          <a:chExt cx="0" cy="0"/>
+        </a:xfrm>
+      </p:grpSpPr>
+      <p:sp>
+        <p:nvSpPr>
+          <p:cNvPr id="2" name="Slide Image Placeholder 1"/>
+          <p:cNvSpPr>
+            <a:spLocks noGrp="1" noRot="1" noChangeAspect="1"/>
+          </p:cNvSpPr>
+          <p:nvPr>
+            <p:ph type="sldImg"/>
+          </p:nvPr>
+        </p:nvSpPr>
+        <p:spPr/>
+      </p:sp>
+      <p:sp>
+        <p:nvSpPr>
+          <p:cNvPr id="3" name="Notes Placeholder 2"/>
+          <p:cNvSpPr>
+            <a:spLocks noGrp="1"/>
+          </p:cNvSpPr>
+          <p:nvPr>
+            <p:ph type="body" idx="1"/>
+          </p:nvPr>
+        </p:nvSpPr>
+        <p:spPr/>
+        <p:txBody>
+          <a:bodyPr/>
+          <a:lstStyle/>
+          <a:p>
+            <a:r>
+              <a:rPr lang="en-US" dirty="0"/>
+              <a:t>When we look at the 11 stores in the territory, performance is highly uneven. </a:t>
+            </a:r>
+            <a:r>
+              <a:rPr lang="en-US" b="1" dirty="0"/>
+              <a:t>Just two stores — 724 in Miami and 728 in Tallahassee — account for 30% of total territory revenue.</a:t>
+            </a:r>
+            <a:r>
+              <a:rPr lang="en-US" dirty="0"/>
+              <a:t> Store 724 alone brought in $619K, and store 728 brought in $542K. Both are in Florida. The remaining nine stores cluster much closer together. This concentration is both an opportunity and a risk.</a:t>
+            </a:r>
+          </a:p>
+        </p:txBody>
+      </p:sp>
+      <p:sp>
+        <p:nvSpPr>
+          <p:cNvPr id="4" name="Slide Number Placeholder 3"/>
+          <p:cNvSpPr>
+            <a:spLocks noGrp="1"/>
+          </p:cNvSpPr>
+          <p:nvPr>
+            <p:ph type="sldNum" sz="quarter" idx="5"/>
+          </p:nvPr>
+        </p:nvSpPr>
+        <p:spPr/>
+        <p:txBody>
+          <a:bodyPr/>
+          <a:lstStyle/>
+          <a:p>
+            <a:fld id="{A7C754CD-AB1C-D041-9D43-C7DD400327C5}" type="slidenum">
+              <a:rPr lang="en-US" smtClean="0"/>
+              <a:t>4</a:t>
+            </a:fld>
+            <a:endParaRPr lang="en-US"/>
+          </a:p>
+        </p:txBody>
+      </p:sp>
+    </p:spTree>
+    <p:extLst>
+      <p:ext uri="{BB962C8B-B14F-4D97-AF65-F5344CB8AC3E}">
+        <p14:creationId xmlns:p14="http://schemas.microsoft.com/office/powerpoint/2010/main" val="3867026046"/>
+      </p:ext>
+    </p:extLst>
+  </p:cSld>
+  <p:clrMapOvr>
+    <a:masterClrMapping/>
+  </p:clrMapOvr>
+</p:notes>
+</file>
+
+<file path=ppt/notesSlides/notesSlide5.xml><?xml version="1.0" encoding="utf-8"?>
+<p:notes xmlns:a="http://schemas.openxmlformats.org/drawingml/2006/main" xmlns:r="http://schemas.openxmlformats.org/officeDocument/2006/relationships" xmlns:p="http://schemas.openxmlformats.org/presentationml/2006/main">
+  <p:cSld>
+    <p:spTree>
+      <p:nvGrpSpPr>
+        <p:cNvPr id="1" name=""/>
+        <p:cNvGrpSpPr/>
+        <p:nvPr/>
+      </p:nvGrpSpPr>
+      <p:grpSpPr>
+        <a:xfrm>
+          <a:off x="0" y="0"/>
+          <a:ext cx="0" cy="0"/>
+          <a:chOff x="0" y="0"/>
+          <a:chExt cx="0" cy="0"/>
+        </a:xfrm>
+      </p:grpSpPr>
+      <p:sp>
+        <p:nvSpPr>
+          <p:cNvPr id="2" name="Slide Image Placeholder 1"/>
+          <p:cNvSpPr>
+            <a:spLocks noGrp="1" noRot="1" noChangeAspect="1"/>
+          </p:cNvSpPr>
+          <p:nvPr>
+            <p:ph type="sldImg"/>
+          </p:nvPr>
+        </p:nvSpPr>
+        <p:spPr/>
+      </p:sp>
+      <p:sp>
+        <p:nvSpPr>
+          <p:cNvPr id="3" name="Notes Placeholder 2"/>
+          <p:cNvSpPr>
+            <a:spLocks noGrp="1"/>
+          </p:cNvSpPr>
+          <p:nvPr>
+            <p:ph type="body" idx="1"/>
+          </p:nvPr>
+        </p:nvSpPr>
+        <p:spPr/>
+        <p:txBody>
+          <a:bodyPr/>
+          <a:lstStyle/>
+          <a:p>
+            <a:r>
+              <a:rPr lang="en-US" dirty="0"/>
+              <a:t>On the customer side, the rewards program reveals a clear pattern. The </a:t>
+            </a:r>
+            <a:r>
+              <a:rPr lang="en-US" b="1" dirty="0"/>
+              <a:t>top 5 rewards customers spend 5 times more</a:t>
+            </a:r>
+            <a:r>
+              <a:rPr lang="en-US" dirty="0"/>
+              <a:t> than the average rewards member — about $4,200 each, versus $844 for the average member. But here's the catch: </a:t>
+            </a:r>
+            <a:r>
+              <a:rPr lang="en-US" b="1" dirty="0"/>
+              <a:t>only 10.6% of all transactions</a:t>
+            </a:r>
+            <a:r>
+              <a:rPr lang="en-US" dirty="0"/>
+              <a:t> come from rewards members at all. That means we have very limited visibility into the other ~89% of our customer base, and there's significant room to grow the program.</a:t>
+            </a:r>
+          </a:p>
+        </p:txBody>
+      </p:sp>
+      <p:sp>
+        <p:nvSpPr>
+          <p:cNvPr id="4" name="Slide Number Placeholder 3"/>
+          <p:cNvSpPr>
+            <a:spLocks noGrp="1"/>
+          </p:cNvSpPr>
+          <p:nvPr>
+            <p:ph type="sldNum" sz="quarter" idx="5"/>
+          </p:nvPr>
+        </p:nvSpPr>
+        <p:spPr/>
+        <p:txBody>
+          <a:bodyPr/>
+          <a:lstStyle/>
+          <a:p>
+            <a:fld id="{A7C754CD-AB1C-D041-9D43-C7DD400327C5}" type="slidenum">
+              <a:rPr lang="en-US" smtClean="0"/>
+              <a:t>5</a:t>
+            </a:fld>
+            <a:endParaRPr lang="en-US"/>
+          </a:p>
+        </p:txBody>
+      </p:sp>
+    </p:spTree>
+    <p:extLst>
+      <p:ext uri="{BB962C8B-B14F-4D97-AF65-F5344CB8AC3E}">
+        <p14:creationId xmlns:p14="http://schemas.microsoft.com/office/powerpoint/2010/main" val="2893032677"/>
+      </p:ext>
+    </p:extLst>
+  </p:cSld>
+  <p:clrMapOvr>
+    <a:masterClrMapping/>
+  </p:clrMapOvr>
+</p:notes>
+</file>
+
+<file path=ppt/notesSlides/notesSlide6.xml><?xml version="1.0" encoding="utf-8"?>
+<p:notes xmlns:a="http://schemas.openxmlformats.org/drawingml/2006/main" xmlns:r="http://schemas.openxmlformats.org/officeDocument/2006/relationships" xmlns:p="http://schemas.openxmlformats.org/presentationml/2006/main">
+  <p:cSld>
+    <p:spTree>
+      <p:nvGrpSpPr>
+        <p:cNvPr id="1" name=""/>
+        <p:cNvGrpSpPr/>
+        <p:nvPr/>
+      </p:nvGrpSpPr>
+      <p:grpSpPr>
+        <a:xfrm>
+          <a:off x="0" y="0"/>
+          <a:ext cx="0" cy="0"/>
+          <a:chOff x="0" y="0"/>
+          <a:chExt cx="0" cy="0"/>
+        </a:xfrm>
+      </p:grpSpPr>
+      <p:sp>
+        <p:nvSpPr>
+          <p:cNvPr id="2" name="Slide Image Placeholder 1"/>
+          <p:cNvSpPr>
+            <a:spLocks noGrp="1" noRot="1" noChangeAspect="1"/>
+          </p:cNvSpPr>
+          <p:nvPr>
+            <p:ph type="sldImg"/>
+          </p:nvPr>
+        </p:nvSpPr>
+        <p:spPr/>
+      </p:sp>
+      <p:sp>
+        <p:nvSpPr>
+          <p:cNvPr id="3" name="Notes Placeholder 2"/>
+          <p:cNvSpPr>
+            <a:spLocks noGrp="1"/>
+          </p:cNvSpPr>
+          <p:nvPr>
+            <p:ph type="body" idx="1"/>
+          </p:nvPr>
+        </p:nvSpPr>
+        <p:spPr/>
+        <p:txBody>
+          <a:bodyPr/>
+          <a:lstStyle/>
+          <a:p>
+            <a:r>
+              <a:rPr lang="en-US" dirty="0"/>
+              <a:t>Looking at what we actually sell, the product mix is heavily skewed. </a:t>
+            </a:r>
+            <a:r>
+              <a:rPr lang="en-US" b="1" dirty="0"/>
+              <a:t>88% of revenue comes from just two categories: Technology &amp; Accessories at 62.7%, and Textbooks at 25.2%.</a:t>
+            </a:r>
+            <a:r>
+              <a:rPr lang="en-US" dirty="0"/>
+              <a:t> The other three categories — art supplies, apparel, and stationery — together make up only 12%. So while Technology is driving the growth we saw earlier, the territory is also heavily dependent on it. A change in tech demand could hit hard.</a:t>
+            </a:r>
+          </a:p>
+        </p:txBody>
+      </p:sp>
+      <p:sp>
+        <p:nvSpPr>
+          <p:cNvPr id="4" name="Slide Number Placeholder 3"/>
+          <p:cNvSpPr>
+            <a:spLocks noGrp="1"/>
+          </p:cNvSpPr>
+          <p:nvPr>
+            <p:ph type="sldNum" sz="quarter" idx="5"/>
+          </p:nvPr>
+        </p:nvSpPr>
+        <p:spPr/>
+        <p:txBody>
+          <a:bodyPr/>
+          <a:lstStyle/>
+          <a:p>
+            <a:fld id="{A7C754CD-AB1C-D041-9D43-C7DD400327C5}" type="slidenum">
+              <a:rPr lang="en-US" smtClean="0"/>
+              <a:t>6</a:t>
+            </a:fld>
+            <a:endParaRPr lang="en-US"/>
+          </a:p>
+        </p:txBody>
+      </p:sp>
+    </p:spTree>
+    <p:extLst>
+      <p:ext uri="{BB962C8B-B14F-4D97-AF65-F5344CB8AC3E}">
+        <p14:creationId xmlns:p14="http://schemas.microsoft.com/office/powerpoint/2010/main" val="2636985827"/>
+      </p:ext>
+    </p:extLst>
+  </p:cSld>
+  <p:clrMapOvr>
+    <a:masterClrMapping/>
+  </p:clrMapOvr>
+</p:notes>
+</file>
+
+<file path=ppt/notesSlides/notesSlide7.xml><?xml version="1.0" encoding="utf-8"?>
+<p:notes xmlns:a="http://schemas.openxmlformats.org/drawingml/2006/main" xmlns:r="http://schemas.openxmlformats.org/officeDocument/2006/relationships" xmlns:p="http://schemas.openxmlformats.org/presentationml/2006/main">
+  <p:cSld>
+    <p:spTree>
+      <p:nvGrpSpPr>
+        <p:cNvPr id="1" name=""/>
+        <p:cNvGrpSpPr/>
+        <p:nvPr/>
+      </p:nvGrpSpPr>
+      <p:grpSpPr>
+        <a:xfrm>
+          <a:off x="0" y="0"/>
+          <a:ext cx="0" cy="0"/>
+          <a:chOff x="0" y="0"/>
+          <a:chExt cx="0" cy="0"/>
+        </a:xfrm>
+      </p:grpSpPr>
+      <p:sp>
+        <p:nvSpPr>
+          <p:cNvPr id="2" name="Slide Image Placeholder 1"/>
+          <p:cNvSpPr>
+            <a:spLocks noGrp="1" noRot="1" noChangeAspect="1"/>
+          </p:cNvSpPr>
+          <p:nvPr>
+            <p:ph type="sldImg"/>
+          </p:nvPr>
+        </p:nvSpPr>
+        <p:spPr/>
+      </p:sp>
+      <p:sp>
+        <p:nvSpPr>
+          <p:cNvPr id="3" name="Notes Placeholder 2"/>
+          <p:cNvSpPr>
+            <a:spLocks noGrp="1"/>
+          </p:cNvSpPr>
+          <p:nvPr>
+            <p:ph type="body" idx="1"/>
+          </p:nvPr>
+        </p:nvSpPr>
+        <p:spPr/>
+        <p:txBody>
+          <a:bodyPr/>
+          <a:lstStyle/>
+          <a:p>
+            <a:r>
+              <a:rPr lang="en-US" dirty="0"/>
+              <a:t>So what should the territory do with these findings? Four actions:</a:t>
+            </a:r>
+          </a:p>
+          <a:p>
+            <a:r>
+              <a:rPr lang="en-US" b="1" dirty="0"/>
+              <a:t>First</a:t>
+            </a:r>
+            <a:r>
+              <a:rPr lang="en-US" dirty="0"/>
+              <a:t>, replicate the Florida success model. Stores 724 and 728 are clearly doing something right — we should study their customer profile, product mix, and operations and apply those lessons to the other nine stores.</a:t>
+            </a:r>
+          </a:p>
+          <a:p>
+            <a:r>
+              <a:rPr lang="en-US" b="1" dirty="0"/>
+              <a:t>Second</a:t>
+            </a:r>
+            <a:r>
+              <a:rPr lang="en-US" dirty="0"/>
+              <a:t>, expand the rewards program. With only 10.6% participation, even modest sign-up incentives at checkout could meaningfully grow it.</a:t>
+            </a:r>
+          </a:p>
+          <a:p>
+            <a:r>
+              <a:rPr lang="en-US" b="1" dirty="0"/>
+              <a:t>Third</a:t>
+            </a:r>
+            <a:r>
+              <a:rPr lang="en-US" dirty="0"/>
+              <a:t>, diversify the category portfolio. Being 88% dependent on two categories is risky — cross-sell campaigns in art supplies and apparel can build a buffer.</a:t>
+            </a:r>
+          </a:p>
+          <a:p>
+            <a:r>
+              <a:rPr lang="en-US" b="1" dirty="0"/>
+              <a:t>And fourth</a:t>
+            </a:r>
+            <a:r>
+              <a:rPr lang="en-US" dirty="0"/>
+              <a:t>, analyze what drove the late-2024 momentum. If we can identify the trigger — whether it was a new product, a price change, or a campaign — we can repeat it and secure 2026 growth.</a:t>
+            </a:r>
+          </a:p>
+          <a:p>
+            <a:r>
+              <a:rPr lang="en-US" dirty="0"/>
+              <a:t>Thank you — happy to take questions.</a:t>
+            </a:r>
+          </a:p>
+          <a:p>
+            <a:endParaRPr lang="en-US" dirty="0"/>
+          </a:p>
+        </p:txBody>
+      </p:sp>
+      <p:sp>
+        <p:nvSpPr>
+          <p:cNvPr id="4" name="Slide Number Placeholder 3"/>
+          <p:cNvSpPr>
+            <a:spLocks noGrp="1"/>
+          </p:cNvSpPr>
+          <p:nvPr>
+            <p:ph type="sldNum" sz="quarter" idx="5"/>
+          </p:nvPr>
+        </p:nvSpPr>
+        <p:spPr/>
+        <p:txBody>
+          <a:bodyPr/>
+          <a:lstStyle/>
+          <a:p>
+            <a:fld id="{A7C754CD-AB1C-D041-9D43-C7DD400327C5}" type="slidenum">
+              <a:rPr lang="en-US" smtClean="0"/>
+              <a:t>7</a:t>
+            </a:fld>
+            <a:endParaRPr lang="en-US"/>
+          </a:p>
+        </p:txBody>
+      </p:sp>
+    </p:spTree>
+    <p:extLst>
+      <p:ext uri="{BB962C8B-B14F-4D97-AF65-F5344CB8AC3E}">
+        <p14:creationId xmlns:p14="http://schemas.microsoft.com/office/powerpoint/2010/main" val="202822285"/>
+      </p:ext>
+    </p:extLst>
+  </p:cSld>
+  <p:clrMapOvr>
+    <a:masterClrMapping/>
+  </p:clrMapOvr>
+</p:notes>
 </file>
 
 <file path=ppt/slideLayouts/slideLayout1.xml><?xml version="1.0" encoding="utf-8"?>
@@ -260,7 +1339,7 @@
           <a:p>
             <a:fld id="{C121D6BF-BB2C-2144-89D8-3B9FE0DB500A}" type="datetimeFigureOut">
               <a:rPr lang="en-US" smtClean="0"/>
-              <a:t>5/28/26</a:t>
+              <a:t>5/29/26</a:t>
             </a:fld>
             <a:endParaRPr lang="en-US"/>
           </a:p>
@@ -458,7 +1537,7 @@
           <a:p>
             <a:fld id="{C121D6BF-BB2C-2144-89D8-3B9FE0DB500A}" type="datetimeFigureOut">
               <a:rPr lang="en-US" smtClean="0"/>
-              <a:t>5/28/26</a:t>
+              <a:t>5/29/26</a:t>
             </a:fld>
             <a:endParaRPr lang="en-US"/>
           </a:p>
@@ -666,7 +1745,7 @@
           <a:p>
             <a:fld id="{C121D6BF-BB2C-2144-89D8-3B9FE0DB500A}" type="datetimeFigureOut">
               <a:rPr lang="en-US" smtClean="0"/>
-              <a:t>5/28/26</a:t>
+              <a:t>5/29/26</a:t>
             </a:fld>
             <a:endParaRPr lang="en-US"/>
           </a:p>
@@ -864,7 +1943,7 @@
           <a:p>
             <a:fld id="{C121D6BF-BB2C-2144-89D8-3B9FE0DB500A}" type="datetimeFigureOut">
               <a:rPr lang="en-US" smtClean="0"/>
-              <a:t>5/28/26</a:t>
+              <a:t>5/29/26</a:t>
             </a:fld>
             <a:endParaRPr lang="en-US"/>
           </a:p>
@@ -1139,7 +2218,7 @@
           <a:p>
             <a:fld id="{C121D6BF-BB2C-2144-89D8-3B9FE0DB500A}" type="datetimeFigureOut">
               <a:rPr lang="en-US" smtClean="0"/>
-              <a:t>5/28/26</a:t>
+              <a:t>5/29/26</a:t>
             </a:fld>
             <a:endParaRPr lang="en-US"/>
           </a:p>
@@ -1404,7 +2483,7 @@
           <a:p>
             <a:fld id="{C121D6BF-BB2C-2144-89D8-3B9FE0DB500A}" type="datetimeFigureOut">
               <a:rPr lang="en-US" smtClean="0"/>
-              <a:t>5/28/26</a:t>
+              <a:t>5/29/26</a:t>
             </a:fld>
             <a:endParaRPr lang="en-US"/>
           </a:p>
@@ -1816,7 +2895,7 @@
           <a:p>
             <a:fld id="{C121D6BF-BB2C-2144-89D8-3B9FE0DB500A}" type="datetimeFigureOut">
               <a:rPr lang="en-US" smtClean="0"/>
-              <a:t>5/28/26</a:t>
+              <a:t>5/29/26</a:t>
             </a:fld>
             <a:endParaRPr lang="en-US"/>
           </a:p>
@@ -1957,7 +3036,7 @@
           <a:p>
             <a:fld id="{C121D6BF-BB2C-2144-89D8-3B9FE0DB500A}" type="datetimeFigureOut">
               <a:rPr lang="en-US" smtClean="0"/>
-              <a:t>5/28/26</a:t>
+              <a:t>5/29/26</a:t>
             </a:fld>
             <a:endParaRPr lang="en-US"/>
           </a:p>
@@ -2070,7 +3149,7 @@
           <a:p>
             <a:fld id="{C121D6BF-BB2C-2144-89D8-3B9FE0DB500A}" type="datetimeFigureOut">
               <a:rPr lang="en-US" smtClean="0"/>
-              <a:t>5/28/26</a:t>
+              <a:t>5/29/26</a:t>
             </a:fld>
             <a:endParaRPr lang="en-US"/>
           </a:p>
@@ -2381,7 +3460,7 @@
           <a:p>
             <a:fld id="{C121D6BF-BB2C-2144-89D8-3B9FE0DB500A}" type="datetimeFigureOut">
               <a:rPr lang="en-US" smtClean="0"/>
-              <a:t>5/28/26</a:t>
+              <a:t>5/29/26</a:t>
             </a:fld>
             <a:endParaRPr lang="en-US"/>
           </a:p>
@@ -2669,7 +3748,7 @@
           <a:p>
             <a:fld id="{C121D6BF-BB2C-2144-89D8-3B9FE0DB500A}" type="datetimeFigureOut">
               <a:rPr lang="en-US" smtClean="0"/>
-              <a:t>5/28/26</a:t>
+              <a:t>5/29/26</a:t>
             </a:fld>
             <a:endParaRPr lang="en-US"/>
           </a:p>
@@ -2910,7 +3989,7 @@
           <a:p>
             <a:fld id="{C121D6BF-BB2C-2144-89D8-3B9FE0DB500A}" type="datetimeFigureOut">
               <a:rPr lang="en-US" smtClean="0"/>
-              <a:t>5/28/26</a:t>
+              <a:t>5/29/26</a:t>
             </a:fld>
             <a:endParaRPr lang="en-US"/>
           </a:p>
@@ -3345,7 +4424,9 @@
         </p:nvSpPr>
         <p:spPr/>
         <p:txBody>
-          <a:bodyPr/>
+          <a:bodyPr>
+            <a:normAutofit fontScale="90000"/>
+          </a:bodyPr>
           <a:lstStyle/>
           <a:p>
             <a:r>
@@ -3610,7 +4691,7 @@
           <p:nvPr/>
         </p:nvPicPr>
         <p:blipFill>
-          <a:blip r:embed="rId2"/>
+          <a:blip r:embed="rId3"/>
           <a:stretch>
             <a:fillRect/>
           </a:stretch>
@@ -3818,6 +4899,14 @@
 <file path=ppt/slides/slide3.xml><?xml version="1.0" encoding="utf-8"?>
 <p:sld xmlns:a="http://schemas.openxmlformats.org/drawingml/2006/main" xmlns:r="http://schemas.openxmlformats.org/officeDocument/2006/relationships" xmlns:p="http://schemas.openxmlformats.org/presentationml/2006/main">
   <p:cSld>
+    <p:bg>
+      <p:bgPr>
+        <a:solidFill>
+          <a:schemeClr val="bg1"/>
+        </a:solidFill>
+        <a:effectLst/>
+      </p:bgPr>
+    </p:bg>
     <p:spTree>
       <p:nvGrpSpPr>
         <p:cNvPr id="1" name=""/>
@@ -3850,17 +4939,25 @@
         </p:nvSpPr>
         <p:spPr>
           <a:xfrm>
-            <a:off x="457200" y="304800"/>
-            <a:ext cx="11277600" cy="600000"/>
+            <a:off x="7910285" y="741391"/>
+            <a:ext cx="3443514" cy="1616203"/>
           </a:xfrm>
         </p:spPr>
         <p:txBody>
-          <a:bodyPr anchor="ctr"/>
-          <a:lstStyle/>
-          <a:p>
-            <a:pPr algn="l"/>
-            <a:r>
-              <a:rPr lang="en-US" sz="2400" b="1" dirty="0"/>
+          <a:bodyPr vert="horz" lIns="91440" tIns="45720" rIns="91440" bIns="45720" rtlCol="0" anchor="b">
+            <a:normAutofit/>
+          </a:bodyPr>
+          <a:lstStyle/>
+          <a:p>
+            <a:r>
+              <a:rPr lang="en-US" sz="3200" b="1" kern="1200">
+                <a:solidFill>
+                  <a:schemeClr val="tx1"/>
+                </a:solidFill>
+                <a:latin typeface="+mj-lt"/>
+                <a:ea typeface="+mj-ea"/>
+                <a:cs typeface="+mj-cs"/>
+              </a:rPr>
               <a:t>Yearly Growth Momentum</a:t>
             </a:r>
           </a:p>
@@ -3868,30 +4965,28 @@
       </p:sp>
       <p:pic>
         <p:nvPicPr>
-          <p:cNvPr id="4" name="Content Placeholder 3">
-            <a:extLst>
-              <a:ext uri="{FF2B5EF4-FFF2-40B4-BE49-F238E27FC236}">
-                <a16:creationId xmlns:a16="http://schemas.microsoft.com/office/drawing/2014/main" id="{CC77139D-1B89-24A0-18EC-94E058346DB6}"/>
+          <p:cNvPr id="7" name="Picture 6">
+            <a:extLst>
+              <a:ext uri="{FF2B5EF4-FFF2-40B4-BE49-F238E27FC236}">
+                <a16:creationId xmlns:a16="http://schemas.microsoft.com/office/drawing/2014/main" id="{B42445DE-A5B2-C73C-A574-292F6E9C7B15}"/>
               </a:ext>
             </a:extLst>
           </p:cNvPr>
           <p:cNvPicPr>
-            <a:picLocks noGrp="1" noChangeAspect="1"/>
+            <a:picLocks noChangeAspect="1"/>
           </p:cNvPicPr>
-          <p:nvPr>
-            <p:ph idx="1"/>
-          </p:nvPr>
+          <p:nvPr/>
         </p:nvPicPr>
         <p:blipFill>
-          <a:blip r:embed="rId2"/>
+          <a:blip r:embed="rId3"/>
           <a:stretch>
             <a:fillRect/>
           </a:stretch>
         </p:blipFill>
         <p:spPr>
           <a:xfrm>
-            <a:off x="304800" y="1050000"/>
-            <a:ext cx="8000000" cy="5500000"/>
+            <a:off x="787114" y="1466877"/>
+            <a:ext cx="6449549" cy="3853604"/>
           </a:xfrm>
           <a:prstGeom prst="rect">
             <a:avLst/>
@@ -3900,22 +4995,28 @@
       </p:pic>
       <p:sp>
         <p:nvSpPr>
-          <p:cNvPr id="100" name="YearlyBreakdown"/>
-          <p:cNvSpPr txBox="1"/>
-          <p:nvPr/>
+          <p:cNvPr id="6" name="Content Placeholder 5">
+            <a:extLst>
+              <a:ext uri="{FF2B5EF4-FFF2-40B4-BE49-F238E27FC236}">
+                <a16:creationId xmlns:a16="http://schemas.microsoft.com/office/drawing/2014/main" id="{9BAC2F68-C817-D6C3-409B-A870DACA5DF5}"/>
+              </a:ext>
+            </a:extLst>
+          </p:cNvPr>
+          <p:cNvSpPr>
+            <a:spLocks noGrp="1"/>
+          </p:cNvSpPr>
+          <p:nvPr>
+            <p:ph idx="1"/>
+          </p:nvPr>
         </p:nvSpPr>
         <p:spPr>
           <a:xfrm>
-            <a:off x="8500000" y="1050000"/>
-            <a:ext cx="3400000" cy="5500000"/>
+            <a:off x="7910285" y="2533476"/>
+            <a:ext cx="3443514" cy="3447832"/>
           </a:xfrm>
-          <a:prstGeom prst="rect">
-            <a:avLst/>
-          </a:prstGeom>
-          <a:noFill/>
         </p:spPr>
         <p:txBody>
-          <a:bodyPr wrap="square" rtlCol="0" anchor="t">
+          <a:bodyPr vert="horz" lIns="91440" tIns="45720" rIns="91440" bIns="45720" rtlCol="0" anchor="t">
             <a:normAutofit/>
           </a:bodyPr>
           <a:lstStyle/>
@@ -3924,11 +5025,7 @@
               <a:buNone/>
             </a:pPr>
             <a:r>
-              <a:rPr lang="en-US" sz="1200" dirty="0">
-                <a:solidFill>
-                  <a:schemeClr val="tx2"/>
-                </a:solidFill>
-              </a:rPr>
+              <a:rPr lang="en-US" sz="1500" b="1" dirty="0"/>
               <a:t>Annual Revenue</a:t>
             </a:r>
           </a:p>
@@ -3936,23 +5033,30 @@
             <a:pPr marL="0" indent="0">
               <a:buNone/>
             </a:pPr>
-            <a:endParaRPr lang="en-US" sz="600"/>
+            <a:r>
+              <a:rPr lang="en-US" sz="1500" b="1" dirty="0"/>
+              <a:t>2022</a:t>
+            </a:r>
+            <a:r>
+              <a:rPr lang="en-US" sz="1500" dirty="0"/>
+              <a:t>     $598K</a:t>
+            </a:r>
           </a:p>
           <a:p>
             <a:pPr marL="0" indent="0">
               <a:buNone/>
             </a:pPr>
             <a:r>
-              <a:rPr lang="en-US" sz="1400" b="1" dirty="0"/>
-              <a:t>2022</a:t>
-            </a:r>
-            <a:r>
-              <a:rPr lang="en-US" sz="1400" dirty="0">
-                <a:solidFill>
-                  <a:schemeClr val="tx2"/>
-                </a:solidFill>
-              </a:rPr>
-              <a:t xml:space="preserve">     $598K</a:t>
+              <a:rPr lang="en-US" sz="1500" b="1" dirty="0"/>
+              <a:t>2023</a:t>
+            </a:r>
+            <a:r>
+              <a:rPr lang="en-US" sz="1500" dirty="0"/>
+              <a:t>     $917K   </a:t>
+            </a:r>
+            <a:r>
+              <a:rPr lang="en-US" sz="1500" b="1" dirty="0"/>
+              <a:t>+%53</a:t>
             </a:r>
           </a:p>
           <a:p>
@@ -3960,142 +5064,251 @@
               <a:buNone/>
             </a:pPr>
             <a:r>
-              <a:rPr lang="en-US" sz="1400" b="1" dirty="0"/>
-              <a:t>2023</a:t>
-            </a:r>
-            <a:r>
-              <a:rPr lang="en-US" sz="1400" dirty="0">
-                <a:solidFill>
-                  <a:schemeClr val="tx2"/>
-                </a:solidFill>
-              </a:rPr>
-              <a:t xml:space="preserve">     $917K   </a:t>
-            </a:r>
-            <a:r>
-              <a:rPr lang="en-US" sz="1100" b="1" dirty="0">
-                <a:solidFill>
-                  <a:srgbClr val="2C5F2D"/>
-                </a:solidFill>
-              </a:rPr>
-              <a:t>+%53</a:t>
+              <a:rPr lang="en-US" sz="1500" b="1" dirty="0"/>
+              <a:t>2024</a:t>
+            </a:r>
+            <a:r>
+              <a:rPr lang="en-US" sz="1500" dirty="0"/>
+              <a:t>     $920K   </a:t>
+            </a:r>
+            <a:r>
+              <a:rPr lang="en-US" sz="1500" b="1" dirty="0"/>
+              <a:t>+%0</a:t>
+            </a:r>
+          </a:p>
+          <a:p>
+            <a:pPr marL="342900" indent="-342900">
+              <a:buAutoNum type="arabicPlain" startAt="2025"/>
+            </a:pPr>
+            <a:r>
+              <a:rPr lang="en-US" sz="1500" dirty="0"/>
+              <a:t>     $1.50M   </a:t>
+            </a:r>
+            <a:r>
+              <a:rPr lang="en-US" sz="1500" b="1" dirty="0"/>
+              <a:t>+%63</a:t>
             </a:r>
           </a:p>
           <a:p>
             <a:pPr marL="0" indent="0">
               <a:buNone/>
             </a:pPr>
-            <a:r>
-              <a:rPr lang="en-US" sz="1400" b="1" dirty="0"/>
-              <a:t>2024</a:t>
-            </a:r>
-            <a:r>
-              <a:rPr lang="en-US" sz="1400" dirty="0">
-                <a:solidFill>
-                  <a:schemeClr val="tx2"/>
-                </a:solidFill>
-              </a:rPr>
-              <a:t xml:space="preserve">     $920K   </a:t>
-            </a:r>
-            <a:r>
-              <a:rPr lang="en-US" sz="1100" b="1" dirty="0">
-                <a:solidFill>
-                  <a:srgbClr val="999999"/>
-                </a:solidFill>
-              </a:rPr>
-              <a:t>+%0</a:t>
-            </a:r>
+            <a:endParaRPr lang="en-US" sz="1500" dirty="0"/>
           </a:p>
           <a:p>
             <a:pPr marL="0" indent="0">
               <a:buNone/>
             </a:pPr>
             <a:r>
-              <a:rPr lang="en-US" sz="1400" b="1" dirty="0"/>
-              <a:t>2025</a:t>
-            </a:r>
-            <a:r>
-              <a:rPr lang="en-US" sz="1400" dirty="0">
-                <a:solidFill>
-                  <a:schemeClr val="tx2"/>
-                </a:solidFill>
-              </a:rPr>
-              <a:t xml:space="preserve">   $1.50M   </a:t>
-            </a:r>
-            <a:r>
-              <a:rPr lang="en-US" sz="1100" b="1" dirty="0">
-                <a:solidFill>
-                  <a:srgbClr val="2C5F2D"/>
-                </a:solidFill>
-              </a:rPr>
-              <a:t>+%63</a:t>
-            </a:r>
+              <a:rPr lang="en-US" sz="1500" b="1" dirty="0"/>
+              <a:t>Highlights</a:t>
+            </a:r>
+            <a:endParaRPr lang="en-US" sz="1500" dirty="0"/>
           </a:p>
           <a:p>
             <a:pPr marL="0" indent="0">
               <a:buNone/>
             </a:pPr>
-            <a:endParaRPr lang="en-US" sz="800"/>
+            <a:r>
+              <a:rPr lang="en-US" sz="1500" dirty="0"/>
+              <a:t>First major jump between 2022–2023</a:t>
+            </a:r>
           </a:p>
           <a:p>
             <a:pPr marL="0" indent="0">
               <a:buNone/>
             </a:pPr>
             <a:r>
-              <a:rPr lang="en-US" sz="1200" b="1" dirty="0">
-                <a:solidFill>
-                  <a:schemeClr val="tx2"/>
-                </a:solidFill>
-              </a:rPr>
-              <a:t>Highlights</a:t>
+              <a:rPr lang="en-US" sz="1500" dirty="0"/>
+              <a:t>Plateau in 2024 — growth stalled</a:t>
             </a:r>
           </a:p>
           <a:p>
             <a:pPr marL="0" indent="0">
               <a:buNone/>
             </a:pPr>
-            <a:endParaRPr lang="en-US" sz="400"/>
-          </a:p>
-          <a:p>
-            <a:pPr marL="0" indent="0">
-              <a:buNone/>
-            </a:pPr>
-            <a:r>
-              <a:rPr lang="en-US" sz="1100" dirty="0"/>
-              <a:t>First major jump between 2022–2023</a:t>
-            </a:r>
-          </a:p>
-          <a:p>
-            <a:pPr marL="0" indent="0">
-              <a:buNone/>
-            </a:pPr>
-            <a:endParaRPr lang="en-US" sz="400"/>
-          </a:p>
-          <a:p>
-            <a:pPr marL="0" indent="0">
-              <a:buNone/>
-            </a:pPr>
-            <a:r>
-              <a:rPr lang="en-US" sz="1100" dirty="0"/>
-              <a:t>Plateau in 2024 — growth stalled</a:t>
-            </a:r>
-          </a:p>
-          <a:p>
-            <a:pPr marL="0" indent="0">
-              <a:buNone/>
-            </a:pPr>
-            <a:endParaRPr lang="en-US" sz="400"/>
-          </a:p>
-          <a:p>
-            <a:pPr marL="0" indent="0">
-              <a:buNone/>
-            </a:pPr>
-            <a:r>
-              <a:rPr lang="en-US" sz="1100" dirty="0"/>
+            <a:r>
+              <a:rPr lang="en-US" sz="1500" dirty="0"/>
               <a:t>Sharp rise from November 2024</a:t>
             </a:r>
           </a:p>
         </p:txBody>
       </p:sp>
+      <p:grpSp>
+        <p:nvGrpSpPr>
+          <p:cNvPr id="105" name="Group 104">
+            <a:extLst>
+              <a:ext uri="{FF2B5EF4-FFF2-40B4-BE49-F238E27FC236}">
+                <a16:creationId xmlns:a16="http://schemas.microsoft.com/office/drawing/2014/main" id="{31C49F18-8757-4E87-5C2E-9D6D7B82BA3B}"/>
+              </a:ext>
+              <a:ext uri="{C183D7F6-B498-43B3-948B-1728B52AA6E4}">
+                <adec:decorative xmlns:adec="http://schemas.microsoft.com/office/drawing/2017/decorative" val="1"/>
+              </a:ext>
+            </a:extLst>
+          </p:cNvPr>
+          <p:cNvGrpSpPr>
+            <a:grpSpLocks noGrp="1" noUngrp="1" noRot="1" noChangeAspect="1" noMove="1" noResize="1"/>
+          </p:cNvGrpSpPr>
+          <p:nvPr>
+            <p:extLst>
+              <p:ext uri="{386F3935-93C4-4BCD-93E2-E3B085C9AB24}">
+                <p16:designElem xmlns:p16="http://schemas.microsoft.com/office/powerpoint/2015/main" val="1"/>
+              </p:ext>
+            </p:extLst>
+          </p:nvPr>
+        </p:nvGrpSpPr>
+        <p:grpSpPr>
+          <a:xfrm>
+            <a:off x="-5025" y="6737718"/>
+            <a:ext cx="12207200" cy="123363"/>
+            <a:chOff x="-5025" y="6737718"/>
+            <a:chExt cx="12207200" cy="123363"/>
+          </a:xfrm>
+        </p:grpSpPr>
+        <p:sp>
+          <p:nvSpPr>
+            <p:cNvPr id="106" name="Rectangle 105">
+              <a:extLst>
+                <a:ext uri="{FF2B5EF4-FFF2-40B4-BE49-F238E27FC236}">
+                  <a16:creationId xmlns:a16="http://schemas.microsoft.com/office/drawing/2014/main" id="{25C84D91-E5BF-B919-ACEF-4A25262CEE72}"/>
+                </a:ext>
+                <a:ext uri="{C183D7F6-B498-43B3-948B-1728B52AA6E4}">
+                  <adec:decorative xmlns:adec="http://schemas.microsoft.com/office/drawing/2017/decorative" val="1"/>
+                </a:ext>
+              </a:extLst>
+            </p:cNvPr>
+            <p:cNvSpPr/>
+            <p:nvPr>
+              <p:extLst>
+                <p:ext uri="{386F3935-93C4-4BCD-93E2-E3B085C9AB24}">
+                  <p16:designElem xmlns:p16="http://schemas.microsoft.com/office/powerpoint/2015/main" val="1"/>
+                </p:ext>
+              </p:extLst>
+            </p:nvPr>
+          </p:nvSpPr>
+          <p:spPr>
+            <a:xfrm rot="5400000" flipH="1">
+              <a:off x="6036894" y="695800"/>
+              <a:ext cx="123362" cy="12207199"/>
+            </a:xfrm>
+            <a:prstGeom prst="rect">
+              <a:avLst/>
+            </a:prstGeom>
+            <a:gradFill>
+              <a:gsLst>
+                <a:gs pos="0">
+                  <a:schemeClr val="accent5"/>
+                </a:gs>
+                <a:gs pos="100000">
+                  <a:schemeClr val="accent2"/>
+                </a:gs>
+              </a:gsLst>
+              <a:lin ang="1800000" scaled="0"/>
+            </a:gradFill>
+            <a:ln>
+              <a:noFill/>
+            </a:ln>
+          </p:spPr>
+          <p:style>
+            <a:lnRef idx="2">
+              <a:schemeClr val="accent1">
+                <a:shade val="50000"/>
+              </a:schemeClr>
+            </a:lnRef>
+            <a:fillRef idx="1">
+              <a:schemeClr val="accent1"/>
+            </a:fillRef>
+            <a:effectRef idx="0">
+              <a:schemeClr val="accent1"/>
+            </a:effectRef>
+            <a:fontRef idx="minor">
+              <a:schemeClr val="lt1"/>
+            </a:fontRef>
+          </p:style>
+          <p:txBody>
+            <a:bodyPr rtlCol="0" anchor="ctr"/>
+            <a:lstStyle/>
+            <a:p>
+              <a:pPr algn="ctr"/>
+              <a:endParaRPr lang="en-US"/>
+            </a:p>
+          </p:txBody>
+        </p:sp>
+        <p:sp>
+          <p:nvSpPr>
+            <p:cNvPr id="107" name="Rectangle 106">
+              <a:extLst>
+                <a:ext uri="{FF2B5EF4-FFF2-40B4-BE49-F238E27FC236}">
+                  <a16:creationId xmlns:a16="http://schemas.microsoft.com/office/drawing/2014/main" id="{DD889E38-27CA-E23F-B646-8D7B4BB17DBC}"/>
+                </a:ext>
+                <a:ext uri="{C183D7F6-B498-43B3-948B-1728B52AA6E4}">
+                  <adec:decorative xmlns:adec="http://schemas.microsoft.com/office/drawing/2017/decorative" val="1"/>
+                </a:ext>
+              </a:extLst>
+            </p:cNvPr>
+            <p:cNvSpPr/>
+            <p:nvPr>
+              <p:extLst>
+                <p:ext uri="{386F3935-93C4-4BCD-93E2-E3B085C9AB24}">
+                  <p16:designElem xmlns:p16="http://schemas.microsoft.com/office/powerpoint/2015/main" val="1"/>
+                </p:ext>
+              </p:extLst>
+            </p:nvPr>
+          </p:nvSpPr>
+          <p:spPr>
+            <a:xfrm rot="16200000">
+              <a:off x="9176406" y="3835311"/>
+              <a:ext cx="123362" cy="5928176"/>
+            </a:xfrm>
+            <a:prstGeom prst="rect">
+              <a:avLst/>
+            </a:prstGeom>
+            <a:gradFill>
+              <a:gsLst>
+                <a:gs pos="19000">
+                  <a:schemeClr val="accent5">
+                    <a:alpha val="0"/>
+                  </a:schemeClr>
+                </a:gs>
+                <a:gs pos="100000">
+                  <a:schemeClr val="accent5">
+                    <a:lumMod val="60000"/>
+                    <a:lumOff val="40000"/>
+                  </a:schemeClr>
+                </a:gs>
+              </a:gsLst>
+              <a:lin ang="600000" scaled="0"/>
+            </a:gradFill>
+            <a:ln>
+              <a:noFill/>
+            </a:ln>
+          </p:spPr>
+          <p:style>
+            <a:lnRef idx="2">
+              <a:schemeClr val="accent1">
+                <a:shade val="50000"/>
+              </a:schemeClr>
+            </a:lnRef>
+            <a:fillRef idx="1">
+              <a:schemeClr val="accent1"/>
+            </a:fillRef>
+            <a:effectRef idx="0">
+              <a:schemeClr val="accent1"/>
+            </a:effectRef>
+            <a:fontRef idx="minor">
+              <a:schemeClr val="lt1"/>
+            </a:fontRef>
+          </p:style>
+          <p:txBody>
+            <a:bodyPr rtlCol="0" anchor="ctr"/>
+            <a:lstStyle/>
+            <a:p>
+              <a:pPr algn="ctr"/>
+              <a:endParaRPr lang="en-US"/>
+            </a:p>
+          </p:txBody>
+        </p:sp>
+      </p:grpSp>
     </p:spTree>
     <p:extLst>
       <p:ext uri="{BB962C8B-B14F-4D97-AF65-F5344CB8AC3E}">
@@ -4184,7 +5397,7 @@
           <p:nvPr/>
         </p:nvPicPr>
         <p:blipFill>
-          <a:blip r:embed="rId2"/>
+          <a:blip r:embed="rId3"/>
           <a:srcRect l="10211" r="13881" b="1"/>
           <a:stretch>
             <a:fillRect/>
@@ -4643,7 +5856,7 @@
                   <a:schemeClr val="tx2"/>
                 </a:solidFill>
               </a:rPr>
-              <a:t xml:space="preserve">   avg. spend of top 5</a:t>
+              <a:t>   avg. spend of top 5</a:t>
             </a:r>
           </a:p>
           <a:p>
@@ -4660,7 +5873,7 @@
                   <a:schemeClr val="tx2"/>
                 </a:solidFill>
               </a:rPr>
-              <a:t xml:space="preserve">     overall rewards customer average</a:t>
+              <a:t>     overall rewards customer average</a:t>
             </a:r>
           </a:p>
           <a:p>
@@ -4708,7 +5921,7 @@
           <p:nvPr/>
         </p:nvPicPr>
         <p:blipFill>
-          <a:blip r:embed="rId2"/>
+          <a:blip r:embed="rId3"/>
           <a:srcRect l="13770" r="12506" b="1"/>
           <a:stretch>
             <a:fillRect/>
@@ -4987,7 +6200,7 @@
           <p:nvPr/>
         </p:nvPicPr>
         <p:blipFill>
-          <a:blip r:embed="rId2"/>
+          <a:blip r:embed="rId3"/>
           <a:stretch>
             <a:fillRect/>
           </a:stretch>
@@ -5817,4 +7030,319 @@
     </a:ext>
   </a:extLst>
 </a:theme>
+</file>
+
+<file path=ppt/theme/theme2.xml><?xml version="1.0" encoding="utf-8"?>
+<a:theme xmlns:a="http://schemas.openxmlformats.org/drawingml/2006/main" name="Office Theme">
+  <a:themeElements>
+    <a:clrScheme name="Office">
+      <a:dk1>
+        <a:sysClr val="windowText" lastClr="000000"/>
+      </a:dk1>
+      <a:lt1>
+        <a:sysClr val="window" lastClr="FFFFFF"/>
+      </a:lt1>
+      <a:dk2>
+        <a:srgbClr val="0E2841"/>
+      </a:dk2>
+      <a:lt2>
+        <a:srgbClr val="E8E8E8"/>
+      </a:lt2>
+      <a:accent1>
+        <a:srgbClr val="156082"/>
+      </a:accent1>
+      <a:accent2>
+        <a:srgbClr val="E97132"/>
+      </a:accent2>
+      <a:accent3>
+        <a:srgbClr val="196B24"/>
+      </a:accent3>
+      <a:accent4>
+        <a:srgbClr val="0F9ED5"/>
+      </a:accent4>
+      <a:accent5>
+        <a:srgbClr val="A02B93"/>
+      </a:accent5>
+      <a:accent6>
+        <a:srgbClr val="4EA72E"/>
+      </a:accent6>
+      <a:hlink>
+        <a:srgbClr val="467886"/>
+      </a:hlink>
+      <a:folHlink>
+        <a:srgbClr val="96607D"/>
+      </a:folHlink>
+    </a:clrScheme>
+    <a:fontScheme name="Office">
+      <a:majorFont>
+        <a:latin typeface="Aptos Display" panose="02110004020202020204"/>
+        <a:ea typeface=""/>
+        <a:cs typeface=""/>
+        <a:font script="Jpan" typeface="游ゴシック Light"/>
+        <a:font script="Hang" typeface="맑은 고딕"/>
+        <a:font script="Hans" typeface="等线 Light"/>
+        <a:font script="Hant" typeface="新細明體"/>
+        <a:font script="Arab" typeface="Times New Roman"/>
+        <a:font script="Hebr" typeface="Times New Roman"/>
+        <a:font script="Thai" typeface="Angsana New"/>
+        <a:font script="Ethi" typeface="Nyala"/>
+        <a:font script="Beng" typeface="Vrinda"/>
+        <a:font script="Gujr" typeface="Shruti"/>
+        <a:font script="Khmr" typeface="MoolBoran"/>
+        <a:font script="Knda" typeface="Tunga"/>
+        <a:font script="Guru" typeface="Raavi"/>
+        <a:font script="Cans" typeface="Euphemia"/>
+        <a:font script="Cher" typeface="Plantagenet Cherokee"/>
+        <a:font script="Yiii" typeface="Microsoft Yi Baiti"/>
+        <a:font script="Tibt" typeface="Microsoft Himalaya"/>
+        <a:font script="Thaa" typeface="MV Boli"/>
+        <a:font script="Deva" typeface="Mangal"/>
+        <a:font script="Telu" typeface="Gautami"/>
+        <a:font script="Taml" typeface="Latha"/>
+        <a:font script="Syrc" typeface="Estrangelo Edessa"/>
+        <a:font script="Orya" typeface="Kalinga"/>
+        <a:font script="Mlym" typeface="Kartika"/>
+        <a:font script="Laoo" typeface="DokChampa"/>
+        <a:font script="Sinh" typeface="Iskoola Pota"/>
+        <a:font script="Mong" typeface="Mongolian Baiti"/>
+        <a:font script="Viet" typeface="Times New Roman"/>
+        <a:font script="Uigh" typeface="Microsoft Uighur"/>
+        <a:font script="Geor" typeface="Sylfaen"/>
+        <a:font script="Armn" typeface="Arial"/>
+        <a:font script="Bugi" typeface="Leelawadee UI"/>
+        <a:font script="Bopo" typeface="Microsoft JhengHei"/>
+        <a:font script="Java" typeface="Javanese Text"/>
+        <a:font script="Lisu" typeface="Segoe UI"/>
+        <a:font script="Mymr" typeface="Myanmar Text"/>
+        <a:font script="Nkoo" typeface="Ebrima"/>
+        <a:font script="Olck" typeface="Nirmala UI"/>
+        <a:font script="Osma" typeface="Ebrima"/>
+        <a:font script="Phag" typeface="Phagspa"/>
+        <a:font script="Syrn" typeface="Estrangelo Edessa"/>
+        <a:font script="Syrj" typeface="Estrangelo Edessa"/>
+        <a:font script="Syre" typeface="Estrangelo Edessa"/>
+        <a:font script="Sora" typeface="Nirmala UI"/>
+        <a:font script="Tale" typeface="Microsoft Tai Le"/>
+        <a:font script="Talu" typeface="Microsoft New Tai Lue"/>
+        <a:font script="Tfng" typeface="Ebrima"/>
+      </a:majorFont>
+      <a:minorFont>
+        <a:latin typeface="Aptos" panose="02110004020202020204"/>
+        <a:ea typeface=""/>
+        <a:cs typeface=""/>
+        <a:font script="Jpan" typeface="游ゴシック"/>
+        <a:font script="Hang" typeface="맑은 고딕"/>
+        <a:font script="Hans" typeface="等线"/>
+        <a:font script="Hant" typeface="新細明體"/>
+        <a:font script="Arab" typeface="Arial"/>
+        <a:font script="Hebr" typeface="Arial"/>
+        <a:font script="Thai" typeface="Cordia New"/>
+        <a:font script="Ethi" typeface="Nyala"/>
+        <a:font script="Beng" typeface="Vrinda"/>
+        <a:font script="Gujr" typeface="Shruti"/>
+        <a:font script="Khmr" typeface="DaunPenh"/>
+        <a:font script="Knda" typeface="Tunga"/>
+        <a:font script="Guru" typeface="Raavi"/>
+        <a:font script="Cans" typeface="Euphemia"/>
+        <a:font script="Cher" typeface="Plantagenet Cherokee"/>
+        <a:font script="Yiii" typeface="Microsoft Yi Baiti"/>
+        <a:font script="Tibt" typeface="Microsoft Himalaya"/>
+        <a:font script="Thaa" typeface="MV Boli"/>
+        <a:font script="Deva" typeface="Mangal"/>
+        <a:font script="Telu" typeface="Gautami"/>
+        <a:font script="Taml" typeface="Latha"/>
+        <a:font script="Syrc" typeface="Estrangelo Edessa"/>
+        <a:font script="Orya" typeface="Kalinga"/>
+        <a:font script="Mlym" typeface="Kartika"/>
+        <a:font script="Laoo" typeface="DokChampa"/>
+        <a:font script="Sinh" typeface="Iskoola Pota"/>
+        <a:font script="Mong" typeface="Mongolian Baiti"/>
+        <a:font script="Viet" typeface="Arial"/>
+        <a:font script="Uigh" typeface="Microsoft Uighur"/>
+        <a:font script="Geor" typeface="Sylfaen"/>
+        <a:font script="Armn" typeface="Arial"/>
+        <a:font script="Bugi" typeface="Leelawadee UI"/>
+        <a:font script="Bopo" typeface="Microsoft JhengHei"/>
+        <a:font script="Java" typeface="Javanese Text"/>
+        <a:font script="Lisu" typeface="Segoe UI"/>
+        <a:font script="Mymr" typeface="Myanmar Text"/>
+        <a:font script="Nkoo" typeface="Ebrima"/>
+        <a:font script="Olck" typeface="Nirmala UI"/>
+        <a:font script="Osma" typeface="Ebrima"/>
+        <a:font script="Phag" typeface="Phagspa"/>
+        <a:font script="Syrn" typeface="Estrangelo Edessa"/>
+        <a:font script="Syrj" typeface="Estrangelo Edessa"/>
+        <a:font script="Syre" typeface="Estrangelo Edessa"/>
+        <a:font script="Sora" typeface="Nirmala UI"/>
+        <a:font script="Tale" typeface="Microsoft Tai Le"/>
+        <a:font script="Talu" typeface="Microsoft New Tai Lue"/>
+        <a:font script="Tfng" typeface="Ebrima"/>
+      </a:minorFont>
+    </a:fontScheme>
+    <a:fmtScheme name="Office">
+      <a:fillStyleLst>
+        <a:solidFill>
+          <a:schemeClr val="phClr"/>
+        </a:solidFill>
+        <a:gradFill rotWithShape="1">
+          <a:gsLst>
+            <a:gs pos="0">
+              <a:schemeClr val="phClr">
+                <a:lumMod val="110000"/>
+                <a:satMod val="105000"/>
+                <a:tint val="67000"/>
+              </a:schemeClr>
+            </a:gs>
+            <a:gs pos="50000">
+              <a:schemeClr val="phClr">
+                <a:lumMod val="105000"/>
+                <a:satMod val="103000"/>
+                <a:tint val="73000"/>
+              </a:schemeClr>
+            </a:gs>
+            <a:gs pos="100000">
+              <a:schemeClr val="phClr">
+                <a:lumMod val="105000"/>
+                <a:satMod val="109000"/>
+                <a:tint val="81000"/>
+              </a:schemeClr>
+            </a:gs>
+          </a:gsLst>
+          <a:lin ang="5400000" scaled="0"/>
+        </a:gradFill>
+        <a:gradFill rotWithShape="1">
+          <a:gsLst>
+            <a:gs pos="0">
+              <a:schemeClr val="phClr">
+                <a:satMod val="103000"/>
+                <a:lumMod val="102000"/>
+                <a:tint val="94000"/>
+              </a:schemeClr>
+            </a:gs>
+            <a:gs pos="50000">
+              <a:schemeClr val="phClr">
+                <a:satMod val="110000"/>
+                <a:lumMod val="100000"/>
+                <a:shade val="100000"/>
+              </a:schemeClr>
+            </a:gs>
+            <a:gs pos="100000">
+              <a:schemeClr val="phClr">
+                <a:lumMod val="99000"/>
+                <a:satMod val="120000"/>
+                <a:shade val="78000"/>
+              </a:schemeClr>
+            </a:gs>
+          </a:gsLst>
+          <a:lin ang="5400000" scaled="0"/>
+        </a:gradFill>
+      </a:fillStyleLst>
+      <a:lnStyleLst>
+        <a:ln w="12700" cap="flat" cmpd="sng" algn="ctr">
+          <a:solidFill>
+            <a:schemeClr val="phClr"/>
+          </a:solidFill>
+          <a:prstDash val="solid"/>
+          <a:miter lim="800000"/>
+        </a:ln>
+        <a:ln w="19050" cap="flat" cmpd="sng" algn="ctr">
+          <a:solidFill>
+            <a:schemeClr val="phClr"/>
+          </a:solidFill>
+          <a:prstDash val="solid"/>
+          <a:miter lim="800000"/>
+        </a:ln>
+        <a:ln w="25400" cap="flat" cmpd="sng" algn="ctr">
+          <a:solidFill>
+            <a:schemeClr val="phClr"/>
+          </a:solidFill>
+          <a:prstDash val="solid"/>
+          <a:miter lim="800000"/>
+        </a:ln>
+      </a:lnStyleLst>
+      <a:effectStyleLst>
+        <a:effectStyle>
+          <a:effectLst/>
+        </a:effectStyle>
+        <a:effectStyle>
+          <a:effectLst/>
+        </a:effectStyle>
+        <a:effectStyle>
+          <a:effectLst>
+            <a:outerShdw blurRad="57150" dist="19050" dir="5400000" algn="ctr" rotWithShape="0">
+              <a:srgbClr val="000000">
+                <a:alpha val="63000"/>
+              </a:srgbClr>
+            </a:outerShdw>
+          </a:effectLst>
+        </a:effectStyle>
+      </a:effectStyleLst>
+      <a:bgFillStyleLst>
+        <a:solidFill>
+          <a:schemeClr val="phClr"/>
+        </a:solidFill>
+        <a:solidFill>
+          <a:schemeClr val="phClr">
+            <a:tint val="95000"/>
+            <a:satMod val="170000"/>
+          </a:schemeClr>
+        </a:solidFill>
+        <a:gradFill rotWithShape="1">
+          <a:gsLst>
+            <a:gs pos="0">
+              <a:schemeClr val="phClr">
+                <a:tint val="93000"/>
+                <a:satMod val="150000"/>
+                <a:shade val="98000"/>
+                <a:lumMod val="102000"/>
+              </a:schemeClr>
+            </a:gs>
+            <a:gs pos="50000">
+              <a:schemeClr val="phClr">
+                <a:tint val="98000"/>
+                <a:satMod val="130000"/>
+                <a:shade val="90000"/>
+                <a:lumMod val="103000"/>
+              </a:schemeClr>
+            </a:gs>
+            <a:gs pos="100000">
+              <a:schemeClr val="phClr">
+                <a:shade val="63000"/>
+                <a:satMod val="120000"/>
+              </a:schemeClr>
+            </a:gs>
+          </a:gsLst>
+          <a:lin ang="5400000" scaled="0"/>
+        </a:gradFill>
+      </a:bgFillStyleLst>
+    </a:fmtScheme>
+  </a:themeElements>
+  <a:objectDefaults>
+    <a:lnDef>
+      <a:spPr/>
+      <a:bodyPr/>
+      <a:lstStyle/>
+      <a:style>
+        <a:lnRef idx="2">
+          <a:schemeClr val="accent1"/>
+        </a:lnRef>
+        <a:fillRef idx="0">
+          <a:schemeClr val="accent1"/>
+        </a:fillRef>
+        <a:effectRef idx="1">
+          <a:schemeClr val="accent1"/>
+        </a:effectRef>
+        <a:fontRef idx="minor">
+          <a:schemeClr val="tx1"/>
+        </a:fontRef>
+      </a:style>
+    </a:lnDef>
+  </a:objectDefaults>
+  <a:extraClrSchemeLst/>
+  <a:extLst>
+    <a:ext uri="{05A4C25C-085E-4340-85A3-A5531E510DB2}">
+      <thm15:themeFamily xmlns:thm15="http://schemas.microsoft.com/office/thememl/2012/main" name="Office Theme" id="{2E142A2C-CD16-42D6-873A-C26D2A0506FA}" vid="{1BDDFF52-6CD6-40A5-AB3C-68EB2F1E4D0A}"/>
+    </a:ext>
+  </a:extLst>
+</a:theme>
 </file>